--- a/paper/slides/GAC-seminar.pptx
+++ b/paper/slides/GAC-seminar.pptx
@@ -7443,7 +7443,7 @@
         <p:spPr>
           <a:xfrm>
             <a:off x="640080" y="4151376"/>
-            <a:ext cx="5291176" cy="1371600"/>
+            <a:ext cx="5291176" cy="1517904"/>
           </a:xfrm>
           <a:prstGeom prst="roundRect">
             <a:avLst>
@@ -7581,8 +7581,8 @@
         </p:nvSpPr>
         <p:spPr>
           <a:xfrm>
-            <a:off x="6260440" y="4151376"/>
-            <a:ext cx="5291176" cy="1371600"/>
+            <a:off x="6260440" y="4151375"/>
+            <a:ext cx="5291176" cy="1517903"/>
           </a:xfrm>
           <a:prstGeom prst="roundRect">
             <a:avLst>
@@ -7997,7 +7997,7 @@
         </p:nvSpPr>
         <p:spPr>
           <a:xfrm>
-            <a:off x="640080" y="5669280"/>
+            <a:off x="640080" y="5840096"/>
             <a:ext cx="10911535" cy="457200"/>
           </a:xfrm>
           <a:prstGeom prst="rect">
